--- a/個別相談/JLINE_PERSONAL_提案資料_小林大致様.pptx
+++ b/個別相談/JLINE_PERSONAL_提案資料_小林大致様.pptx
@@ -7963,6 +7963,16 @@
           <a:lstStyle/>
           <a:p>
             <a:pPr algn="l"/>
+            <a:r>
+              <a:rPr lang="ja-JP" sz="2000" b="1">
+                <a:solidFill>
+                  <a:srgbClr val="141414"/>
+                </a:solidFill>
+                <a:latin typeface="Noto Sans JP"/>
+                <a:ea typeface="Noto Sans JP"/>
+              </a:rPr>
+              <a:t>相手の重心と間合いを見て抜くドリブル。顔を上げたまま運べる</a:t>
+            </a:r>
             <a:endParaRPr lang="ja-JP" sz="2000" b="1">
               <a:solidFill>
                 <a:srgbClr val="141414"/>
@@ -7996,6 +8006,35 @@
           <a:lstStyle/>
           <a:p>
             <a:pPr algn="l"/>
+            <a:r>
+              <a:rPr lang="ja-JP" sz="2000" b="1">
+                <a:solidFill>
+                  <a:srgbClr val="141414"/>
+                </a:solidFill>
+                <a:latin typeface="Noto Sans JP"/>
+                <a:ea typeface="Noto Sans JP"/>
+              </a:rPr>
+              <a:t>首は振れている。課題は、受ける前の味方とのタイミング合わせ</a:t>
+            </a:r>
+            <a:br>
+              <a:rPr lang="ja-JP" sz="2000" b="1">
+                <a:solidFill>
+                  <a:srgbClr val="141414"/>
+                </a:solidFill>
+                <a:latin typeface="Noto Sans JP"/>
+                <a:ea typeface="Noto Sans JP"/>
+              </a:rPr>
+            </a:br>
+            <a:r>
+              <a:rPr lang="ja-JP" sz="2000" b="1">
+                <a:solidFill>
+                  <a:srgbClr val="141414"/>
+                </a:solidFill>
+                <a:latin typeface="Noto Sans JP"/>
+                <a:ea typeface="Noto Sans JP"/>
+              </a:rPr>
+              <a:t>→ チェックの動き・声・アイコンタクト</a:t>
+            </a:r>
             <a:endParaRPr lang="ja-JP" sz="2000" b="1">
               <a:solidFill>
                 <a:srgbClr val="141414"/>
@@ -8029,6 +8068,35 @@
           <a:lstStyle/>
           <a:p>
             <a:pPr algn="l"/>
+            <a:r>
+              <a:rPr lang="ja-JP" sz="2000" b="1">
+                <a:solidFill>
+                  <a:srgbClr val="141414"/>
+                </a:solidFill>
+                <a:latin typeface="Noto Sans JP"/>
+                <a:ea typeface="Noto Sans JP"/>
+              </a:rPr>
+              <a:t>試合のあと、自分で課題を1つ挙げて次に試すことまで言える</a:t>
+            </a:r>
+            <a:br>
+              <a:rPr lang="ja-JP" sz="2000" b="1">
+                <a:solidFill>
+                  <a:srgbClr val="141414"/>
+                </a:solidFill>
+                <a:latin typeface="Noto Sans JP"/>
+                <a:ea typeface="Noto Sans JP"/>
+              </a:rPr>
+            </a:br>
+            <a:r>
+              <a:rPr lang="ja-JP" sz="2000" b="1">
+                <a:solidFill>
+                  <a:srgbClr val="141414"/>
+                </a:solidFill>
+                <a:latin typeface="Noto Sans JP"/>
+                <a:ea typeface="Noto Sans JP"/>
+              </a:rPr>
+              <a:t>自分から味方に「ちょうだい」と要求できる</a:t>
+            </a:r>
             <a:endParaRPr lang="ja-JP" sz="2000" b="1">
               <a:solidFill>
                 <a:srgbClr val="141414"/>

--- a/個別相談/JLINE_PERSONAL_提案資料_小林大致様.pptx
+++ b/個別相談/JLINE_PERSONAL_提案資料_小林大致様.pptx
@@ -539,13 +539,13 @@
           <a:p>
             <a:r>
               <a:rPr lang="ja-JP"/>
-              <a:t>02 本当の課題：ボールが来る前の準備（首振り・体の向き・立ち位置）。6年生相手だと時間とスペースが減り、トレセンの良さが出にくい。※お父さんが最初に言った課題と違う角度で書く</a:t>
+              <a:t>02 今日の映像で感じた課題：受ける前の味方とのタイミング合わせ（チェックの動き・声・アイコンタクト）。本当の課題は、受講後に試合映像を重ねて見極める</a:t>
             </a:r>
           </a:p>
           <a:p>
             <a:r>
               <a:rPr lang="ja-JP"/>
-              <a:t>03 6ヶ月後（2027年3月・5年生になる前）：試合のあと、自分で課題を1つ挙げて、次に試すことまで自分の言葉で言える。お父さんは質問役で、親子の振り返りが週1回回っている</a:t>
+              <a:t>03 6ヶ月後に目指す状態：初回面談では決めない。ご契約後のセットアップミーティングで、保護者の方と一緒に決める</a:t>
             </a:r>
           </a:p>
           <a:p>
@@ -7575,7 +7575,7 @@
                 <a:latin typeface="Noto Sans JP"/>
                 <a:ea typeface="Noto Sans JP"/>
               </a:rPr>
-              <a:t>本当の課題</a:t>
+              <a:t>今日の映像で感じた課題</a:t>
             </a:r>
           </a:p>
         </p:txBody>
@@ -7611,7 +7611,7 @@
                 <a:latin typeface="Noto Sans JP"/>
                 <a:ea typeface="Noto Sans JP"/>
               </a:rPr>
-              <a:t>先に手をつけるところ</a:t>
+              <a:t>本当の課題は、受講後に見極めます</a:t>
             </a:r>
           </a:p>
         </p:txBody>
@@ -8014,7 +8014,7 @@
                 <a:latin typeface="Noto Sans JP"/>
                 <a:ea typeface="Noto Sans JP"/>
               </a:rPr>
-              <a:t>首は振れている。課題は、受ける前の味方とのタイミング合わせ</a:t>
+              <a:t>スローインを受ける場面での、味方とのタイミング合わせ</a:t>
             </a:r>
             <a:br>
               <a:rPr lang="ja-JP" sz="2000" b="1">
@@ -8076,7 +8076,7 @@
                 <a:latin typeface="Noto Sans JP"/>
                 <a:ea typeface="Noto Sans JP"/>
               </a:rPr>
-              <a:t>試合のあと、自分で課題を1つ挙げて次に試すことまで言える</a:t>
+              <a:t>ご契約後のセットアップミーティングで、</a:t>
             </a:r>
             <a:br>
               <a:rPr lang="ja-JP" sz="2000" b="1">
@@ -8095,7 +8095,7 @@
                 <a:latin typeface="Noto Sans JP"/>
                 <a:ea typeface="Noto Sans JP"/>
               </a:rPr>
-              <a:t>自分から味方に「ちょうだい」と要求できる</a:t>
+              <a:t>保護者の方と一緒に決めます</a:t>
             </a:r>
             <a:endParaRPr lang="ja-JP" sz="2000" b="1">
               <a:solidFill>

--- a/個別相談/JLINE_PERSONAL_提案資料_小林大致様.pptx
+++ b/個別相談/JLINE_PERSONAL_提案資料_小林大致様.pptx
@@ -553,7 +553,7 @@
           </a:p>
           <a:p>
             <a:r>
-              <a:t>※★必ずその場で埋める。空欄のまま送らない。</a:t>
+              <a:t>※★01と02は必ずその場で埋める。空欄のまま送らない。03は「ご契約後に決めます」と記載済み。</a:t>
             </a:r>
           </a:p>
           <a:p>
@@ -615,12 +615,12 @@
           </a:p>
           <a:p>
             <a:r>
-              <a:t>2つ目、本当の課題。（親御さんの主訴とズラした、あの課題）</a:t>
-            </a:r>
-          </a:p>
-          <a:p>
-            <a:r>
-              <a:t>ここから先に手をつけます。</a:t>
+              <a:t>2つ目、今日の映像で感じた課題。（親御さんの主訴とズラした、あの課題）</a:t>
+            </a:r>
+          </a:p>
+          <a:p>
+            <a:r>
+              <a:t>本当の課題は、受講後に試合の映像を重ねて見極めます。まずは、ここから試してみます。</a:t>
             </a:r>
           </a:p>
           <a:p>
@@ -628,12 +628,12 @@
           </a:p>
           <a:p>
             <a:r>
-              <a:t>3つ目、6ヶ月後にどうなっていたいか。</a:t>
-            </a:r>
-          </a:p>
-          <a:p>
-            <a:r>
-              <a:t>（ヒアリングで聞いた1年後の目標から逆算して置く）</a:t>
+              <a:t>3つ目、6ヶ月後に目指す状態。</a:t>
+            </a:r>
+          </a:p>
+          <a:p>
+            <a:r>
+              <a:t>ここは、ご契約後のセットアップミーティングで、保護者の方と一緒に決めます。</a:t>
             </a:r>
           </a:p>
           <a:p>
@@ -649,7 +649,7 @@
           </a:p>
           <a:p>
             <a:r>
-              <a:t>※3つ目は必ず観測できる状態で書く。</a:t>
+              <a:t>※3つ目は初回の面談では決めない。1本の映像だけでは本当の課題が分からないため。セットアップミーティングで決めるときは、観測できる状態で書く。</a:t>
             </a:r>
           </a:p>
           <a:p>
